--- a/lectures/lecture32_33_34/oo_design.pptx
+++ b/lectures/lecture32_33_34/oo_design.pptx
@@ -139,7 +139,7 @@
   <pc:docChgLst>
     <pc:chgData name="Toby Donaldson" userId="2e6e5431-bb17-4c41-9985-d39c50d83c73" providerId="ADAL" clId="{F31BC264-820E-54C4-A6D1-F92AF9CC222E}"/>
     <pc:docChg chg="undo redo custSel addSld delSld modSld sldOrd">
-      <pc:chgData name="Toby Donaldson" userId="2e6e5431-bb17-4c41-9985-d39c50d83c73" providerId="ADAL" clId="{F31BC264-820E-54C4-A6D1-F92AF9CC222E}" dt="2026-08-04T18:38:46.790" v="8007" actId="113"/>
+      <pc:chgData name="Toby Donaldson" userId="2e6e5431-bb17-4c41-9985-d39c50d83c73" providerId="ADAL" clId="{F31BC264-820E-54C4-A6D1-F92AF9CC222E}" dt="2026-08-04T19:34:19.313" v="8041" actId="20577"/>
       <pc:docMkLst>
         <pc:docMk/>
       </pc:docMkLst>
@@ -665,7 +665,7 @@
         </pc:cxnChg>
       </pc:sldChg>
       <pc:sldChg chg="modSp new mod">
-        <pc:chgData name="Toby Donaldson" userId="2e6e5431-bb17-4c41-9985-d39c50d83c73" providerId="ADAL" clId="{F31BC264-820E-54C4-A6D1-F92AF9CC222E}" dt="2026-08-04T18:38:46.790" v="8007" actId="113"/>
+        <pc:chgData name="Toby Donaldson" userId="2e6e5431-bb17-4c41-9985-d39c50d83c73" providerId="ADAL" clId="{F31BC264-820E-54C4-A6D1-F92AF9CC222E}" dt="2026-08-04T19:34:19.313" v="8041" actId="20577"/>
         <pc:sldMkLst>
           <pc:docMk/>
           <pc:sldMk cId="3276483395" sldId="270"/>
@@ -679,7 +679,7 @@
           </ac:spMkLst>
         </pc:spChg>
         <pc:spChg chg="mod">
-          <ac:chgData name="Toby Donaldson" userId="2e6e5431-bb17-4c41-9985-d39c50d83c73" providerId="ADAL" clId="{F31BC264-820E-54C4-A6D1-F92AF9CC222E}" dt="2026-08-04T18:38:46.790" v="8007" actId="113"/>
+          <ac:chgData name="Toby Donaldson" userId="2e6e5431-bb17-4c41-9985-d39c50d83c73" providerId="ADAL" clId="{F31BC264-820E-54C4-A6D1-F92AF9CC222E}" dt="2026-08-04T19:34:19.313" v="8041" actId="20577"/>
           <ac:spMkLst>
             <pc:docMk/>
             <pc:sldMk cId="3276483395" sldId="270"/>
@@ -6048,7 +6048,7 @@
         <p:spPr/>
         <p:txBody>
           <a:bodyPr>
-            <a:normAutofit/>
+            <a:normAutofit lnSpcReduction="10000"/>
           </a:bodyPr>
           <a:lstStyle/>
           <a:p>
@@ -6123,8 +6123,13 @@
             </a:r>
             <a:r>
               <a:rPr lang="en-US" dirty="0"/>
-              <a:t>: don’t put implementations in base classes</a:t>
-            </a:r>
+              <a:t>: don’t put implementations in base classes (i.e. don’t </a:t>
+            </a:r>
+            <a:r>
+              <a:rPr lang="en-US"/>
+              <a:t>inher</a:t>
+            </a:r>
+            <a:endParaRPr lang="en-US" dirty="0"/>
           </a:p>
           <a:p>
             <a:pPr marL="0" indent="0">
